--- a/plan.pptx
+++ b/plan.pptx
@@ -6,10 +6,8 @@
   </p:sldMasterIdLst>
   <p:sldIdLst>
     <p:sldId id="259" r:id="rId2"/>
-    <p:sldId id="260" r:id="rId3"/>
-    <p:sldId id="257" r:id="rId4"/>
-    <p:sldId id="258" r:id="rId5"/>
-    <p:sldId id="256" r:id="rId6"/>
+    <p:sldId id="257" r:id="rId3"/>
+    <p:sldId id="258" r:id="rId4"/>
   </p:sldIdLst>
   <p:sldSz cx="12192000" cy="6858000"/>
   <p:notesSz cx="6858000" cy="9144000"/>
@@ -3348,7 +3346,7 @@
         </p:nvSpPr>
         <p:spPr>
           <a:xfrm>
-            <a:off x="950495" y="386433"/>
+            <a:off x="761999" y="228393"/>
             <a:ext cx="10668000" cy="395620"/>
           </a:xfrm>
         </p:spPr>
@@ -3359,8 +3357,8 @@
           <a:lstStyle/>
           <a:p>
             <a:r>
-              <a:rPr lang="ru-RU" sz="4400" b="1" dirty="0"/>
-              <a:t>Текущий план по фиче ведения статистики</a:t>
+              <a:rPr lang="ru-RU" sz="4000" b="1" dirty="0"/>
+              <a:t>Текущий план по новым фичам</a:t>
             </a:r>
           </a:p>
         </p:txBody>
@@ -3383,7 +3381,7 @@
         </p:nvSpPr>
         <p:spPr>
           <a:xfrm>
-            <a:off x="0" y="890337"/>
+            <a:off x="0" y="624013"/>
             <a:ext cx="12192000" cy="3465095"/>
           </a:xfrm>
         </p:spPr>
@@ -3407,7 +3405,11 @@
               <a:t>[</a:t>
             </a:r>
             <a:r>
-              <a:rPr lang="ru-RU" dirty="0"/>
+              <a:rPr lang="ru-RU" dirty="0">
+                <a:highlight>
+                  <a:srgbClr val="FFFF00"/>
+                </a:highlight>
+              </a:rPr>
               <a:t>пока неясен формат отметок</a:t>
             </a:r>
             <a:r>
@@ -3445,6 +3447,356 @@
               <a:t> Сценарий: выбор тренировки → кнопка «Присвоить звезду» → ввести порядковый номер участника → данные отправляются в таблицу статистики</a:t>
             </a:r>
             <a:endParaRPr lang="ru-RU" i="1" u="sng" dirty="0"/>
+          </a:p>
+        </p:txBody>
+      </p:sp>
+      <p:sp>
+        <p:nvSpPr>
+          <p:cNvPr id="4" name="Заголовок 1">
+            <a:extLst>
+              <a:ext uri="{FF2B5EF4-FFF2-40B4-BE49-F238E27FC236}">
+                <a16:creationId xmlns:a16="http://schemas.microsoft.com/office/drawing/2014/main" id="{D67A0FAF-FCA9-41BF-9072-87A7BA9879DF}"/>
+              </a:ext>
+            </a:extLst>
+          </p:cNvPr>
+          <p:cNvSpPr txBox="1">
+            <a:spLocks/>
+          </p:cNvSpPr>
+          <p:nvPr/>
+        </p:nvSpPr>
+        <p:spPr>
+          <a:xfrm>
+            <a:off x="838200" y="681037"/>
+            <a:ext cx="10515600" cy="657559"/>
+          </a:xfrm>
+          <a:prstGeom prst="rect">
+            <a:avLst/>
+          </a:prstGeom>
+        </p:spPr>
+        <p:txBody>
+          <a:bodyPr vert="horz" lIns="91440" tIns="45720" rIns="91440" bIns="45720" rtlCol="0" anchor="b">
+            <a:normAutofit fontScale="75000" lnSpcReduction="20000"/>
+          </a:bodyPr>
+          <a:lstStyle>
+            <a:lvl1pPr algn="ctr" defTabSz="914400" rtl="0" eaLnBrk="1" latinLnBrk="0" hangingPunct="1">
+              <a:lnSpc>
+                <a:spcPct val="90000"/>
+              </a:lnSpc>
+              <a:spcBef>
+                <a:spcPct val="0"/>
+              </a:spcBef>
+              <a:buNone/>
+              <a:defRPr sz="6000" kern="1200">
+                <a:solidFill>
+                  <a:schemeClr val="tx1"/>
+                </a:solidFill>
+                <a:latin typeface="+mj-lt"/>
+                <a:ea typeface="+mj-ea"/>
+                <a:cs typeface="+mj-cs"/>
+              </a:defRPr>
+            </a:lvl1pPr>
+          </a:lstStyle>
+          <a:p>
+            <a:endParaRPr lang="ru-RU" dirty="0"/>
+          </a:p>
+        </p:txBody>
+      </p:sp>
+      <p:sp>
+        <p:nvSpPr>
+          <p:cNvPr id="5" name="Объект 2">
+            <a:extLst>
+              <a:ext uri="{FF2B5EF4-FFF2-40B4-BE49-F238E27FC236}">
+                <a16:creationId xmlns:a16="http://schemas.microsoft.com/office/drawing/2014/main" id="{629DA153-E256-41F6-92EE-A61140547E8C}"/>
+              </a:ext>
+            </a:extLst>
+          </p:cNvPr>
+          <p:cNvSpPr txBox="1">
+            <a:spLocks/>
+          </p:cNvSpPr>
+          <p:nvPr/>
+        </p:nvSpPr>
+        <p:spPr>
+          <a:xfrm>
+            <a:off x="1" y="3185192"/>
+            <a:ext cx="12192000" cy="3215608"/>
+          </a:xfrm>
+          <a:prstGeom prst="rect">
+            <a:avLst/>
+          </a:prstGeom>
+        </p:spPr>
+        <p:txBody>
+          <a:bodyPr vert="horz" lIns="91440" tIns="45720" rIns="91440" bIns="45720" rtlCol="0">
+            <a:normAutofit/>
+          </a:bodyPr>
+          <a:lstStyle>
+            <a:lvl1pPr marL="0" indent="0" algn="ctr" defTabSz="914400" rtl="0" eaLnBrk="1" latinLnBrk="0" hangingPunct="1">
+              <a:lnSpc>
+                <a:spcPct val="90000"/>
+              </a:lnSpc>
+              <a:spcBef>
+                <a:spcPts val="1000"/>
+              </a:spcBef>
+              <a:buFont typeface="Arial" panose="020B0604020202020204" pitchFamily="34" charset="0"/>
+              <a:buNone/>
+              <a:defRPr sz="2400" kern="1200">
+                <a:solidFill>
+                  <a:schemeClr val="tx1"/>
+                </a:solidFill>
+                <a:latin typeface="+mn-lt"/>
+                <a:ea typeface="+mn-ea"/>
+                <a:cs typeface="+mn-cs"/>
+              </a:defRPr>
+            </a:lvl1pPr>
+            <a:lvl2pPr marL="457200" indent="0" algn="ctr" defTabSz="914400" rtl="0" eaLnBrk="1" latinLnBrk="0" hangingPunct="1">
+              <a:lnSpc>
+                <a:spcPct val="90000"/>
+              </a:lnSpc>
+              <a:spcBef>
+                <a:spcPts val="500"/>
+              </a:spcBef>
+              <a:buFont typeface="Arial" panose="020B0604020202020204" pitchFamily="34" charset="0"/>
+              <a:buNone/>
+              <a:defRPr sz="2000" kern="1200">
+                <a:solidFill>
+                  <a:schemeClr val="tx1"/>
+                </a:solidFill>
+                <a:latin typeface="+mn-lt"/>
+                <a:ea typeface="+mn-ea"/>
+                <a:cs typeface="+mn-cs"/>
+              </a:defRPr>
+            </a:lvl2pPr>
+            <a:lvl3pPr marL="914400" indent="0" algn="ctr" defTabSz="914400" rtl="0" eaLnBrk="1" latinLnBrk="0" hangingPunct="1">
+              <a:lnSpc>
+                <a:spcPct val="90000"/>
+              </a:lnSpc>
+              <a:spcBef>
+                <a:spcPts val="500"/>
+              </a:spcBef>
+              <a:buFont typeface="Arial" panose="020B0604020202020204" pitchFamily="34" charset="0"/>
+              <a:buNone/>
+              <a:defRPr sz="1800" kern="1200">
+                <a:solidFill>
+                  <a:schemeClr val="tx1"/>
+                </a:solidFill>
+                <a:latin typeface="+mn-lt"/>
+                <a:ea typeface="+mn-ea"/>
+                <a:cs typeface="+mn-cs"/>
+              </a:defRPr>
+            </a:lvl3pPr>
+            <a:lvl4pPr marL="1371600" indent="0" algn="ctr" defTabSz="914400" rtl="0" eaLnBrk="1" latinLnBrk="0" hangingPunct="1">
+              <a:lnSpc>
+                <a:spcPct val="90000"/>
+              </a:lnSpc>
+              <a:spcBef>
+                <a:spcPts val="500"/>
+              </a:spcBef>
+              <a:buFont typeface="Arial" panose="020B0604020202020204" pitchFamily="34" charset="0"/>
+              <a:buNone/>
+              <a:defRPr sz="1600" kern="1200">
+                <a:solidFill>
+                  <a:schemeClr val="tx1"/>
+                </a:solidFill>
+                <a:latin typeface="+mn-lt"/>
+                <a:ea typeface="+mn-ea"/>
+                <a:cs typeface="+mn-cs"/>
+              </a:defRPr>
+            </a:lvl4pPr>
+            <a:lvl5pPr marL="1828800" indent="0" algn="ctr" defTabSz="914400" rtl="0" eaLnBrk="1" latinLnBrk="0" hangingPunct="1">
+              <a:lnSpc>
+                <a:spcPct val="90000"/>
+              </a:lnSpc>
+              <a:spcBef>
+                <a:spcPts val="500"/>
+              </a:spcBef>
+              <a:buFont typeface="Arial" panose="020B0604020202020204" pitchFamily="34" charset="0"/>
+              <a:buNone/>
+              <a:defRPr sz="1600" kern="1200">
+                <a:solidFill>
+                  <a:schemeClr val="tx1"/>
+                </a:solidFill>
+                <a:latin typeface="+mn-lt"/>
+                <a:ea typeface="+mn-ea"/>
+                <a:cs typeface="+mn-cs"/>
+              </a:defRPr>
+            </a:lvl5pPr>
+            <a:lvl6pPr marL="2286000" indent="0" algn="ctr" defTabSz="914400" rtl="0" eaLnBrk="1" latinLnBrk="0" hangingPunct="1">
+              <a:lnSpc>
+                <a:spcPct val="90000"/>
+              </a:lnSpc>
+              <a:spcBef>
+                <a:spcPts val="500"/>
+              </a:spcBef>
+              <a:buFont typeface="Arial" panose="020B0604020202020204" pitchFamily="34" charset="0"/>
+              <a:buNone/>
+              <a:defRPr sz="1600" kern="1200">
+                <a:solidFill>
+                  <a:schemeClr val="tx1"/>
+                </a:solidFill>
+                <a:latin typeface="+mn-lt"/>
+                <a:ea typeface="+mn-ea"/>
+                <a:cs typeface="+mn-cs"/>
+              </a:defRPr>
+            </a:lvl6pPr>
+            <a:lvl7pPr marL="2743200" indent="0" algn="ctr" defTabSz="914400" rtl="0" eaLnBrk="1" latinLnBrk="0" hangingPunct="1">
+              <a:lnSpc>
+                <a:spcPct val="90000"/>
+              </a:lnSpc>
+              <a:spcBef>
+                <a:spcPts val="500"/>
+              </a:spcBef>
+              <a:buFont typeface="Arial" panose="020B0604020202020204" pitchFamily="34" charset="0"/>
+              <a:buNone/>
+              <a:defRPr sz="1600" kern="1200">
+                <a:solidFill>
+                  <a:schemeClr val="tx1"/>
+                </a:solidFill>
+                <a:latin typeface="+mn-lt"/>
+                <a:ea typeface="+mn-ea"/>
+                <a:cs typeface="+mn-cs"/>
+              </a:defRPr>
+            </a:lvl7pPr>
+            <a:lvl8pPr marL="3200400" indent="0" algn="ctr" defTabSz="914400" rtl="0" eaLnBrk="1" latinLnBrk="0" hangingPunct="1">
+              <a:lnSpc>
+                <a:spcPct val="90000"/>
+              </a:lnSpc>
+              <a:spcBef>
+                <a:spcPts val="500"/>
+              </a:spcBef>
+              <a:buFont typeface="Arial" panose="020B0604020202020204" pitchFamily="34" charset="0"/>
+              <a:buNone/>
+              <a:defRPr sz="1600" kern="1200">
+                <a:solidFill>
+                  <a:schemeClr val="tx1"/>
+                </a:solidFill>
+                <a:latin typeface="+mn-lt"/>
+                <a:ea typeface="+mn-ea"/>
+                <a:cs typeface="+mn-cs"/>
+              </a:defRPr>
+            </a:lvl8pPr>
+            <a:lvl9pPr marL="3657600" indent="0" algn="ctr" defTabSz="914400" rtl="0" eaLnBrk="1" latinLnBrk="0" hangingPunct="1">
+              <a:lnSpc>
+                <a:spcPct val="90000"/>
+              </a:lnSpc>
+              <a:spcBef>
+                <a:spcPts val="500"/>
+              </a:spcBef>
+              <a:buFont typeface="Arial" panose="020B0604020202020204" pitchFamily="34" charset="0"/>
+              <a:buNone/>
+              <a:defRPr sz="1600" kern="1200">
+                <a:solidFill>
+                  <a:schemeClr val="tx1"/>
+                </a:solidFill>
+                <a:latin typeface="+mn-lt"/>
+                <a:ea typeface="+mn-ea"/>
+                <a:cs typeface="+mn-cs"/>
+              </a:defRPr>
+            </a:lvl9pPr>
+          </a:lstStyle>
+          <a:p>
+            <a:pPr algn="just"/>
+            <a:r>
+              <a:rPr lang="ru-RU" sz="3200" b="1" dirty="0"/>
+              <a:t>Фича «1+1»</a:t>
+            </a:r>
+            <a:endParaRPr lang="ru-RU" sz="2000" dirty="0"/>
+          </a:p>
+          <a:p>
+            <a:pPr algn="just"/>
+            <a:r>
+              <a:rPr lang="ru-RU" sz="2000" dirty="0"/>
+              <a:t>Выбор тренировки → кнопка «Записать друга» → ввод никнейма → подтверждение «Да» или «Нет» → отправка значения</a:t>
+            </a:r>
+            <a:r>
+              <a:rPr lang="en-US" sz="2000" dirty="0"/>
+              <a:t> True </a:t>
+            </a:r>
+            <a:r>
+              <a:rPr lang="ru-RU" sz="2000" dirty="0"/>
+              <a:t>в поле «</a:t>
+            </a:r>
+            <a:r>
+              <a:rPr lang="en-US" sz="2000" i="1" dirty="0">
+                <a:effectLst>
+                  <a:outerShdw blurRad="38100" dist="38100" dir="2700000" algn="tl">
+                    <a:srgbClr val="000000">
+                      <a:alpha val="43137"/>
+                    </a:srgbClr>
+                  </a:outerShdw>
+                </a:effectLst>
+              </a:rPr>
+              <a:t>friend</a:t>
+            </a:r>
+            <a:r>
+              <a:rPr lang="ru-RU" sz="2000" dirty="0"/>
+              <a:t>»</a:t>
+            </a:r>
+            <a:r>
+              <a:rPr lang="en-US" sz="2000" dirty="0"/>
+              <a:t> </a:t>
+            </a:r>
+            <a:r>
+              <a:rPr lang="ru-RU" sz="2000" dirty="0"/>
+              <a:t>модели «</a:t>
+            </a:r>
+            <a:r>
+              <a:rPr lang="en-US" sz="2000" i="1" dirty="0" err="1">
+                <a:effectLst>
+                  <a:outerShdw blurRad="38100" dist="38100" dir="2700000" algn="tl">
+                    <a:srgbClr val="000000">
+                      <a:alpha val="43137"/>
+                    </a:srgbClr>
+                  </a:outerShdw>
+                </a:effectLst>
+              </a:rPr>
+              <a:t>EventUser</a:t>
+            </a:r>
+            <a:r>
+              <a:rPr lang="ru-RU" sz="2000" dirty="0"/>
+              <a:t>» и добавление новой записи в эту же модель «</a:t>
+            </a:r>
+            <a:r>
+              <a:rPr lang="en-US" sz="2000" i="1" dirty="0" err="1">
+                <a:effectLst>
+                  <a:outerShdw blurRad="38100" dist="38100" dir="2700000" algn="tl">
+                    <a:srgbClr val="000000">
+                      <a:alpha val="43137"/>
+                    </a:srgbClr>
+                  </a:outerShdw>
+                </a:effectLst>
+              </a:rPr>
+              <a:t>EventUser</a:t>
+            </a:r>
+            <a:r>
+              <a:rPr lang="ru-RU" sz="2000" dirty="0"/>
+              <a:t>»</a:t>
+            </a:r>
+          </a:p>
+          <a:p>
+            <a:pPr algn="just"/>
+            <a:r>
+              <a:rPr lang="ru-RU" sz="2000" dirty="0"/>
+              <a:t>Кнопка «Записать друга» на данную тренировку доступна если:</a:t>
+            </a:r>
+          </a:p>
+          <a:p>
+            <a:pPr marL="342900" indent="-342900" algn="just">
+              <a:buFont typeface="Arial" panose="020B0604020202020204" pitchFamily="34" charset="0"/>
+              <a:buChar char="•"/>
+            </a:pPr>
+            <a:r>
+              <a:rPr lang="ru-RU" sz="2000" dirty="0"/>
+              <a:t>никого ранее Вы не добавляли;</a:t>
+            </a:r>
+          </a:p>
+          <a:p>
+            <a:pPr marL="342900" indent="-342900" algn="just">
+              <a:buFont typeface="Arial" panose="020B0604020202020204" pitchFamily="34" charset="0"/>
+              <a:buChar char="•"/>
+            </a:pPr>
+            <a:r>
+              <a:rPr lang="ru-RU" sz="2000" dirty="0"/>
+              <a:t>если добавляемый друг зарегистрирован в боте.</a:t>
+            </a:r>
           </a:p>
         </p:txBody>
       </p:sp>
@@ -3483,7 +3835,7 @@
           <p:cNvPr id="2" name="Заголовок 1">
             <a:extLst>
               <a:ext uri="{FF2B5EF4-FFF2-40B4-BE49-F238E27FC236}">
-                <a16:creationId xmlns:a16="http://schemas.microsoft.com/office/drawing/2014/main" id="{10D3EF7C-0C05-4E9B-8B05-BB24DE93B018}"/>
+                <a16:creationId xmlns:a16="http://schemas.microsoft.com/office/drawing/2014/main" id="{55E9AAEF-AA4C-48E1-BE34-DC4F8FC67589}"/>
               </a:ext>
             </a:extLst>
           </p:cNvPr>
@@ -3496,8 +3848,8 @@
         </p:nvSpPr>
         <p:spPr>
           <a:xfrm>
-            <a:off x="838200" y="124494"/>
-            <a:ext cx="10515600" cy="657559"/>
+            <a:off x="838200" y="365125"/>
+            <a:ext cx="10515600" cy="489117"/>
           </a:xfrm>
         </p:spPr>
         <p:txBody>
@@ -3507,49 +3859,102 @@
           <a:lstStyle/>
           <a:p>
             <a:r>
+              <a:rPr lang="ru-RU" b="1" dirty="0"/>
+              <a:t>Замечания Романа</a:t>
+            </a:r>
+          </a:p>
+        </p:txBody>
+      </p:sp>
+      <p:sp>
+        <p:nvSpPr>
+          <p:cNvPr id="3" name="Объект 2">
+            <a:extLst>
+              <a:ext uri="{FF2B5EF4-FFF2-40B4-BE49-F238E27FC236}">
+                <a16:creationId xmlns:a16="http://schemas.microsoft.com/office/drawing/2014/main" id="{C0CEADC2-F39E-4E59-BB1F-5B232F7B4D2E}"/>
+              </a:ext>
+            </a:extLst>
+          </p:cNvPr>
+          <p:cNvSpPr>
+            <a:spLocks noGrp="1"/>
+          </p:cNvSpPr>
+          <p:nvPr>
+            <p:ph idx="1"/>
+          </p:nvPr>
+        </p:nvSpPr>
+        <p:spPr>
+          <a:xfrm>
+            <a:off x="838200" y="1336508"/>
+            <a:ext cx="10515600" cy="4351338"/>
+          </a:xfrm>
+        </p:spPr>
+        <p:txBody>
+          <a:bodyPr/>
+          <a:lstStyle/>
+          <a:p>
+            <a:pPr marL="0" indent="0">
+              <a:buNone/>
+            </a:pPr>
+            <a:r>
               <a:rPr lang="ru-RU" dirty="0"/>
-              <a:t>Добавление фичи «1+1»</a:t>
-            </a:r>
-          </a:p>
-        </p:txBody>
-      </p:sp>
-      <p:sp>
-        <p:nvSpPr>
-          <p:cNvPr id="3" name="Объект 2">
-            <a:extLst>
-              <a:ext uri="{FF2B5EF4-FFF2-40B4-BE49-F238E27FC236}">
-                <a16:creationId xmlns:a16="http://schemas.microsoft.com/office/drawing/2014/main" id="{EC90E12E-D0B6-4C39-991D-8D84C16BE772}"/>
-              </a:ext>
-            </a:extLst>
-          </p:cNvPr>
-          <p:cNvSpPr>
-            <a:spLocks noGrp="1"/>
-          </p:cNvSpPr>
-          <p:nvPr>
-            <p:ph idx="1"/>
-          </p:nvPr>
-        </p:nvSpPr>
-        <p:spPr/>
-        <p:txBody>
-          <a:bodyPr/>
-          <a:lstStyle/>
-          <a:p>
+              <a:t>Перед списком тренировок надо сделать категории. Баскет, волейбол, теннис </a:t>
+            </a:r>
+          </a:p>
+          <a:p>
+            <a:pPr marL="0" indent="0">
+              <a:buNone/>
+            </a:pPr>
             <a:r>
               <a:rPr lang="ru-RU" dirty="0"/>
-              <a:t>Выбор тренировки </a:t>
-            </a:r>
-            <a:r>
-              <a:rPr lang="ru-RU"/>
-              <a:t>→ кнопка «»</a:t>
+              <a:t>После нажатия туда список из ближайших тренировок в формате дата , время, краткое наименование, получится например так </a:t>
+            </a:r>
+          </a:p>
+          <a:p>
+            <a:pPr marL="0" indent="0">
+              <a:buNone/>
+            </a:pPr>
+            <a:r>
+              <a:rPr lang="ru-RU" dirty="0"/>
+              <a:t>____</a:t>
+            </a:r>
+          </a:p>
+          <a:p>
+            <a:pPr marL="0" indent="0">
+              <a:buNone/>
+            </a:pPr>
+            <a:r>
+              <a:rPr lang="ru-RU" dirty="0"/>
+              <a:t>05.10.2025, 18:00, </a:t>
+            </a:r>
+            <a:r>
+              <a:rPr lang="ru-RU" dirty="0" err="1"/>
+              <a:t>Яраткан</a:t>
             </a:r>
             <a:endParaRPr lang="ru-RU" dirty="0"/>
+          </a:p>
+          <a:p>
+            <a:pPr marL="0" indent="0">
+              <a:buNone/>
+            </a:pPr>
+            <a:r>
+              <a:rPr lang="ru-RU" dirty="0"/>
+              <a:t>____</a:t>
+            </a:r>
+          </a:p>
+          <a:p>
+            <a:pPr marL="0" indent="0">
+              <a:buNone/>
+            </a:pPr>
+            <a:r>
+              <a:rPr lang="ru-RU" dirty="0"/>
+              <a:t>05.10.2025, 20:00, Энерго</a:t>
+            </a:r>
           </a:p>
         </p:txBody>
       </p:sp>
     </p:spTree>
     <p:extLst>
       <p:ext uri="{BB962C8B-B14F-4D97-AF65-F5344CB8AC3E}">
-        <p14:creationId xmlns:p14="http://schemas.microsoft.com/office/powerpoint/2010/main" val="3967732687"/>
+        <p14:creationId xmlns:p14="http://schemas.microsoft.com/office/powerpoint/2010/main" val="3467029891"/>
       </p:ext>
     </p:extLst>
   </p:cSld>
@@ -3581,157 +3986,6 @@
           <p:cNvPr id="2" name="Заголовок 1">
             <a:extLst>
               <a:ext uri="{FF2B5EF4-FFF2-40B4-BE49-F238E27FC236}">
-                <a16:creationId xmlns:a16="http://schemas.microsoft.com/office/drawing/2014/main" id="{55E9AAEF-AA4C-48E1-BE34-DC4F8FC67589}"/>
-              </a:ext>
-            </a:extLst>
-          </p:cNvPr>
-          <p:cNvSpPr>
-            <a:spLocks noGrp="1"/>
-          </p:cNvSpPr>
-          <p:nvPr>
-            <p:ph type="title"/>
-          </p:nvPr>
-        </p:nvSpPr>
-        <p:spPr>
-          <a:xfrm>
-            <a:off x="838200" y="365125"/>
-            <a:ext cx="10515600" cy="489117"/>
-          </a:xfrm>
-        </p:spPr>
-        <p:txBody>
-          <a:bodyPr>
-            <a:normAutofit fontScale="90000"/>
-          </a:bodyPr>
-          <a:lstStyle/>
-          <a:p>
-            <a:r>
-              <a:rPr lang="ru-RU" b="1" dirty="0"/>
-              <a:t>Замечания Романа</a:t>
-            </a:r>
-          </a:p>
-        </p:txBody>
-      </p:sp>
-      <p:sp>
-        <p:nvSpPr>
-          <p:cNvPr id="3" name="Объект 2">
-            <a:extLst>
-              <a:ext uri="{FF2B5EF4-FFF2-40B4-BE49-F238E27FC236}">
-                <a16:creationId xmlns:a16="http://schemas.microsoft.com/office/drawing/2014/main" id="{C0CEADC2-F39E-4E59-BB1F-5B232F7B4D2E}"/>
-              </a:ext>
-            </a:extLst>
-          </p:cNvPr>
-          <p:cNvSpPr>
-            <a:spLocks noGrp="1"/>
-          </p:cNvSpPr>
-          <p:nvPr>
-            <p:ph idx="1"/>
-          </p:nvPr>
-        </p:nvSpPr>
-        <p:spPr>
-          <a:xfrm>
-            <a:off x="838200" y="1336508"/>
-            <a:ext cx="10515600" cy="4351338"/>
-          </a:xfrm>
-        </p:spPr>
-        <p:txBody>
-          <a:bodyPr/>
-          <a:lstStyle/>
-          <a:p>
-            <a:pPr marL="0" indent="0">
-              <a:buNone/>
-            </a:pPr>
-            <a:r>
-              <a:rPr lang="ru-RU" dirty="0"/>
-              <a:t>Перед списком тренировок надо сделать категории. Баскет, волейбол, теннис </a:t>
-            </a:r>
-          </a:p>
-          <a:p>
-            <a:pPr marL="0" indent="0">
-              <a:buNone/>
-            </a:pPr>
-            <a:r>
-              <a:rPr lang="ru-RU" dirty="0"/>
-              <a:t>После нажатия туда список из ближайших тренировок в формате дата , время, краткое наименование, получится например так </a:t>
-            </a:r>
-          </a:p>
-          <a:p>
-            <a:pPr marL="0" indent="0">
-              <a:buNone/>
-            </a:pPr>
-            <a:r>
-              <a:rPr lang="ru-RU" dirty="0"/>
-              <a:t>____</a:t>
-            </a:r>
-          </a:p>
-          <a:p>
-            <a:pPr marL="0" indent="0">
-              <a:buNone/>
-            </a:pPr>
-            <a:r>
-              <a:rPr lang="ru-RU" dirty="0"/>
-              <a:t>05.10.2025, 18:00, </a:t>
-            </a:r>
-            <a:r>
-              <a:rPr lang="ru-RU" dirty="0" err="1"/>
-              <a:t>Яраткан</a:t>
-            </a:r>
-            <a:endParaRPr lang="ru-RU" dirty="0"/>
-          </a:p>
-          <a:p>
-            <a:pPr marL="0" indent="0">
-              <a:buNone/>
-            </a:pPr>
-            <a:r>
-              <a:rPr lang="ru-RU" dirty="0"/>
-              <a:t>____</a:t>
-            </a:r>
-          </a:p>
-          <a:p>
-            <a:pPr marL="0" indent="0">
-              <a:buNone/>
-            </a:pPr>
-            <a:r>
-              <a:rPr lang="ru-RU" dirty="0"/>
-              <a:t>05.10.2025, 20:00, Энерго</a:t>
-            </a:r>
-          </a:p>
-        </p:txBody>
-      </p:sp>
-    </p:spTree>
-    <p:extLst>
-      <p:ext uri="{BB962C8B-B14F-4D97-AF65-F5344CB8AC3E}">
-        <p14:creationId xmlns:p14="http://schemas.microsoft.com/office/powerpoint/2010/main" val="3467029891"/>
-      </p:ext>
-    </p:extLst>
-  </p:cSld>
-  <p:clrMapOvr>
-    <a:masterClrMapping/>
-  </p:clrMapOvr>
-</p:sld>
-</file>
-
-<file path=ppt/slides/slide4.xml><?xml version="1.0" encoding="utf-8"?>
-<p:sld xmlns:a="http://schemas.openxmlformats.org/drawingml/2006/main" xmlns:r="http://schemas.openxmlformats.org/officeDocument/2006/relationships" xmlns:p="http://schemas.openxmlformats.org/presentationml/2006/main">
-  <p:cSld>
-    <p:spTree>
-      <p:nvGrpSpPr>
-        <p:cNvPr id="1" name=""/>
-        <p:cNvGrpSpPr/>
-        <p:nvPr/>
-      </p:nvGrpSpPr>
-      <p:grpSpPr>
-        <a:xfrm>
-          <a:off x="0" y="0"/>
-          <a:ext cx="0" cy="0"/>
-          <a:chOff x="0" y="0"/>
-          <a:chExt cx="0" cy="0"/>
-        </a:xfrm>
-      </p:grpSpPr>
-      <p:sp>
-        <p:nvSpPr>
-          <p:cNvPr id="2" name="Заголовок 1">
-            <a:extLst>
-              <a:ext uri="{FF2B5EF4-FFF2-40B4-BE49-F238E27FC236}">
                 <a16:creationId xmlns:a16="http://schemas.microsoft.com/office/drawing/2014/main" id="{2B37589D-FE7B-4C04-A87D-D8E75931A0D8}"/>
               </a:ext>
             </a:extLst>
@@ -3875,112 +4129,6 @@
     <p:extLst>
       <p:ext uri="{BB962C8B-B14F-4D97-AF65-F5344CB8AC3E}">
         <p14:creationId xmlns:p14="http://schemas.microsoft.com/office/powerpoint/2010/main" val="4014290529"/>
-      </p:ext>
-    </p:extLst>
-  </p:cSld>
-  <p:clrMapOvr>
-    <a:masterClrMapping/>
-  </p:clrMapOvr>
-</p:sld>
-</file>
-
-<file path=ppt/slides/slide5.xml><?xml version="1.0" encoding="utf-8"?>
-<p:sld xmlns:a="http://schemas.openxmlformats.org/drawingml/2006/main" xmlns:r="http://schemas.openxmlformats.org/officeDocument/2006/relationships" xmlns:p="http://schemas.openxmlformats.org/presentationml/2006/main">
-  <p:cSld>
-    <p:spTree>
-      <p:nvGrpSpPr>
-        <p:cNvPr id="1" name=""/>
-        <p:cNvGrpSpPr/>
-        <p:nvPr/>
-      </p:nvGrpSpPr>
-      <p:grpSpPr>
-        <a:xfrm>
-          <a:off x="0" y="0"/>
-          <a:ext cx="0" cy="0"/>
-          <a:chOff x="0" y="0"/>
-          <a:chExt cx="0" cy="0"/>
-        </a:xfrm>
-      </p:grpSpPr>
-      <p:sp>
-        <p:nvSpPr>
-          <p:cNvPr id="2" name="Заголовок 1">
-            <a:extLst>
-              <a:ext uri="{FF2B5EF4-FFF2-40B4-BE49-F238E27FC236}">
-                <a16:creationId xmlns:a16="http://schemas.microsoft.com/office/drawing/2014/main" id="{24B23AC2-338A-4064-BAFC-B16AFDBFD1D4}"/>
-              </a:ext>
-            </a:extLst>
-          </p:cNvPr>
-          <p:cNvSpPr>
-            <a:spLocks noGrp="1"/>
-          </p:cNvSpPr>
-          <p:nvPr>
-            <p:ph type="ctrTitle"/>
-          </p:nvPr>
-        </p:nvSpPr>
-        <p:spPr>
-          <a:xfrm>
-            <a:off x="1299411" y="406400"/>
-            <a:ext cx="10030326" cy="508000"/>
-          </a:xfrm>
-        </p:spPr>
-        <p:txBody>
-          <a:bodyPr>
-            <a:normAutofit fontScale="90000"/>
-          </a:bodyPr>
-          <a:lstStyle/>
-          <a:p>
-            <a:r>
-              <a:rPr lang="ru-RU" dirty="0"/>
-              <a:t>Сценарий выбора тренировки</a:t>
-            </a:r>
-          </a:p>
-        </p:txBody>
-      </p:sp>
-      <p:sp>
-        <p:nvSpPr>
-          <p:cNvPr id="3" name="Подзаголовок 2">
-            <a:extLst>
-              <a:ext uri="{FF2B5EF4-FFF2-40B4-BE49-F238E27FC236}">
-                <a16:creationId xmlns:a16="http://schemas.microsoft.com/office/drawing/2014/main" id="{D48E46F1-68A8-46B4-8D68-B99B3C84EA23}"/>
-              </a:ext>
-            </a:extLst>
-          </p:cNvPr>
-          <p:cNvSpPr>
-            <a:spLocks noGrp="1"/>
-          </p:cNvSpPr>
-          <p:nvPr>
-            <p:ph type="subTitle" idx="1"/>
-          </p:nvPr>
-        </p:nvSpPr>
-        <p:spPr/>
-        <p:txBody>
-          <a:bodyPr/>
-          <a:lstStyle/>
-          <a:p>
-            <a:r>
-              <a:rPr lang="ru-RU" dirty="0"/>
-              <a:t>Меню → список </a:t>
-            </a:r>
-            <a:r>
-              <a:rPr lang="ru-RU"/>
-              <a:t>видов спорта → 05.10.2025</a:t>
-            </a:r>
-            <a:r>
-              <a:rPr lang="ru-RU" dirty="0"/>
-              <a:t>, 18:00, </a:t>
-            </a:r>
-            <a:r>
-              <a:rPr lang="ru-RU" dirty="0" err="1"/>
-              <a:t>Яраткан</a:t>
-            </a:r>
-            <a:endParaRPr lang="ru-RU" dirty="0"/>
-          </a:p>
-        </p:txBody>
-      </p:sp>
-    </p:spTree>
-    <p:extLst>
-      <p:ext uri="{BB962C8B-B14F-4D97-AF65-F5344CB8AC3E}">
-        <p14:creationId xmlns:p14="http://schemas.microsoft.com/office/powerpoint/2010/main" val="993884365"/>
       </p:ext>
     </p:extLst>
   </p:cSld>

--- a/plan.pptx
+++ b/plan.pptx
@@ -3446,6 +3446,24 @@
               <a:rPr lang="ru-RU" dirty="0"/>
               <a:t> Сценарий: выбор тренировки → кнопка «Присвоить звезду» → ввести порядковый номер участника → данные отправляются в таблицу статистики</a:t>
             </a:r>
+            <a:endParaRPr lang="en-US" dirty="0"/>
+          </a:p>
+          <a:p>
+            <a:pPr marL="457200" indent="-457200" algn="just">
+              <a:buAutoNum type="arabicPeriod"/>
+            </a:pPr>
+            <a:r>
+              <a:rPr lang="ru-RU" i="1" u="sng" dirty="0"/>
+              <a:t>Как пользователь выбирает тренировку.</a:t>
+            </a:r>
+            <a:r>
+              <a:rPr lang="ru-RU" dirty="0"/>
+              <a:t> Кнопка «Выбор </a:t>
+            </a:r>
+            <a:r>
+              <a:rPr lang="ru-RU"/>
+              <a:t>тренировки» → «»</a:t>
+            </a:r>
             <a:endParaRPr lang="ru-RU" i="1" u="sng" dirty="0"/>
           </a:p>
         </p:txBody>
